--- a/decks/geog-living-world/geog-living-world_ch6_desert-development.pptx
+++ b/decks/geog-living-world/geog-living-world_ch6_desert-development.pptx
@@ -129,30 +129,30 @@
   <p:extLst>
     <p:ext uri="{521415D9-36F7-43E2-AB2F-B90AF26B5E84}">
       <p14:sectionLst xmlns:p14="http://schemas.microsoft.com/office/powerpoint/2010/main">
-        <p14:section name="Opening" id="{a9b89b6f-df24-231c-f740-647bdb4d18e3}">
+        <p14:section name="Opening" id="{c81befe2-ddcf-2951-356e-5d74889de166}">
           <p14:sldIdLst>
             <p14:sldId id="256"/>
           </p14:sldIdLst>
         </p14:section>
-        <p14:section name="Gate" id="{30c0f205-a35e-f050-6b07-404741993bed}">
+        <p14:section name="Gate" id="{517ce238-4ce8-f05b-d8c2-45eb3f5a91e5}">
           <p14:sldIdLst>
             <p14:sldId id="257"/>
             <p14:sldId id="258"/>
           </p14:sldIdLst>
         </p14:section>
-        <p14:section name="Pre-teach" id="{3d6fe5b7-6ba7-b789-1492-0fb4f86ab6fb}">
+        <p14:section name="Pre-teach" id="{023f9224-d01a-8579-f3a1-75bfdedbc313}">
           <p14:sldIdLst>
             <p14:sldId id="259"/>
             <p14:sldId id="260"/>
           </p14:sldIdLst>
         </p14:section>
-        <p14:section name="Read-along" id="{9bffb0f3-79a9-574e-f86c-b0d45e286f97}">
+        <p14:section name="Read-along" id="{5675c31a-643a-2fdd-c446-63e10b8a6cf7}">
           <p14:sldIdLst>
             <p14:sldId id="261"/>
             <p14:sldId id="262"/>
           </p14:sldIdLst>
         </p14:section>
-        <p14:section name="Teach" id="{24dcc4fc-317c-b779-b898-b28779485d87}">
+        <p14:section name="Teach" id="{2eaad9f1-31b2-bc69-f0bd-95dc38c08b93}">
           <p14:sldIdLst>
             <p14:sldId id="263"/>
             <p14:sldId id="264"/>
@@ -162,7 +162,7 @@
             <p14:sldId id="268"/>
           </p14:sldIdLst>
         </p14:section>
-        <p14:section name="Routes" id="{e73d1388-8bf9-02f0-6412-592c80c59aa9}">
+        <p14:section name="Routes" id="{71643f6f-9ffa-9a8e-1dbd-c2251cb46b27}">
           <p14:sldIdLst>
             <p14:sldId id="269"/>
             <p14:sldId id="270"/>
@@ -172,12 +172,12 @@
             <p14:sldId id="274"/>
           </p14:sldIdLst>
         </p14:section>
-        <p14:section name="Close" id="{4aaf81ae-5770-be55-fdb9-7253b27f85e6}">
+        <p14:section name="Close" id="{f51e8138-3ab3-e57a-80d9-853148f7a8c9}">
           <p14:sldIdLst>
             <p14:sldId id="275"/>
           </p14:sldIdLst>
         </p14:section>
-        <p14:section name="Answers" id="{70d18809-2731-54de-1178-3da8a7e714a0}">
+        <p14:section name="Answers" id="{0eed7145-b8dc-b273-df84-a4f3579db7ad}">
           <p14:sldIdLst>
             <p14:sldId id="276"/>
             <p14:sldId id="277"/>
@@ -681,7 +681,7 @@
               <a:rPr lang="en-US" dirty="0"/>
               <a:t>Teach — Challenges: physical and human. Say it in your own words, then check understanding with a quick question: ask a pupil from the pre-teach group first, since they met these words and ideas before the lesson. Pupils try to recall before you re-explain.
 The challenges of developing hot deserts can be physical or human. Your recall list of physical challenges ran: an arid climate, extreme heat, floods (sudden downpours on hard, bare ground), a hostile ecosystem, salty soils, thin soils, shifting sands, wind erosion and dust storms, and thin vegetation. These are problems the desert itself sets.
-The human challenges were the cards in your diamond nine: the high cost of providing water, salinisation, population growth, lack of roads, pollution threats, existing nomadic populations, the need for conservation, remoteness and desertification. The desert is inaccessible, so infrastructure (roads, pipes, power lines) must be built from scratch at great cost. Supplying water means pumping it from deep aquifers or piping it long distances, and irrigating with it brings its own problem: in the heat the water evaporates and leaves its salts behind, so the soil becomes saline and infertile. People already live there: nomadic herders move their camels and goats to find grazing in a land where plants are sparse, and development can take away their land and water.
+The human challenges were the cards in your diamond nine: remoteness and a lack of roads, the high cost of providing water, salinisation, desertification, population growth, pollution threats, the existing nomadic populations and the need for conservation. The desert is inaccessible, so infrastructure (roads, pipes, power lines) must be built from scratch at great cost. Supplying water means pumping it from deep aquifers or piping it long distances, and irrigating with it brings its own problem: in the heat the water evaporates and leaves its salts behind, so the soil becomes saline and infertile. People already live there: nomadic herders move their camels and goats to find grazing in a land where plants are sparse, and development can take away their land and water.
 Your six-mark model on how the desert climate affects people made three developed points: heat and dryness mean sparse vegetation, so herders must keep moving; long summer droughts mean people must store food and water for months; and sandy, infertile soil plus dust storms that flatten fields make crop farming hard and keep farmers poor. Each point goes from climate to plants or soil to people, which is what the examiner means by developed.
 Worked example — model it step by step, thinking aloud: Plan a six-mark answer to the question: Discuss the extent of the opportunities available to develop the Sahara Desert. (1) Point 1: water. Opportunity: vast aquifers under the desert could irrigate farmland. Challenge: pumping and piping it is expensive, and irrigation causes salinisation. (2) Point 2: minerals and fossil fuels. Opportunity: oil, gas and minerals earn export income. Challenge: the desert is remote and inaccessible, so roads, pipelines and workers all cost extra. (3) Point 3: farming. Opportunity: desert agriculture (sorghum) and agroforestry. Challenge: thin, infertile soils, extreme heat and unreliable rain limit yields. (4) Finish with a judgement: the opportunities are real but each is limited by cost and inaccessibility, so development is possible only to a moderate extent. Answer: Three developed points, each pairing an opportunity with its barrier, ending with a judgement on the extent..
 Tip: Discuss and to what extent both need a judgement at the end. Decide how far, then say why.</a:t>
@@ -774,7 +774,7 @@
               <a:rPr lang="en-US" dirty="0"/>
               <a:t>Teach — Challenges: physical and human. Say it in your own words, then check understanding with a quick question: ask a pupil from the pre-teach group first, since they met these words and ideas before the lesson. Pupils try to recall before you re-explain.
 The challenges of developing hot deserts can be physical or human. Your recall list of physical challenges ran: an arid climate, extreme heat, floods (sudden downpours on hard, bare ground), a hostile ecosystem, salty soils, thin soils, shifting sands, wind erosion and dust storms, and thin vegetation. These are problems the desert itself sets.
-The human challenges were the cards in your diamond nine: the high cost of providing water, salinisation, population growth, lack of roads, pollution threats, existing nomadic populations, the need for conservation, remoteness and desertification. The desert is inaccessible, so infrastructure (roads, pipes, power lines) must be built from scratch at great cost. Supplying water means pumping it from deep aquifers or piping it long distances, and irrigating with it brings its own problem: in the heat the water evaporates and leaves its salts behind, so the soil becomes saline and infertile. People already live there: nomadic herders move their camels and goats to find grazing in a land where plants are sparse, and development can take away their land and water.
+The human challenges were the cards in your diamond nine: remoteness and a lack of roads, the high cost of providing water, salinisation, desertification, population growth, pollution threats, the existing nomadic populations and the need for conservation. The desert is inaccessible, so infrastructure (roads, pipes, power lines) must be built from scratch at great cost. Supplying water means pumping it from deep aquifers or piping it long distances, and irrigating with it brings its own problem: in the heat the water evaporates and leaves its salts behind, so the soil becomes saline and infertile. People already live there: nomadic herders move their camels and goats to find grazing in a land where plants are sparse, and development can take away their land and water.
 Your six-mark model on how the desert climate affects people made three developed points: heat and dryness mean sparse vegetation, so herders must keep moving; long summer droughts mean people must store food and water for months; and sandy, infertile soil plus dust storms that flatten fields make crop farming hard and keep farmers poor. Each point goes from climate to plants or soil to people, which is what the examiner means by developed.
 Worked example — model it step by step, thinking aloud: Plan a six-mark answer to the question: Discuss the extent of the opportunities available to develop the Sahara Desert. (1) Point 1: water. Opportunity: vast aquifers under the desert could irrigate farmland. Challenge: pumping and piping it is expensive, and irrigation causes salinisation. (2) Point 2: minerals and fossil fuels. Opportunity: oil, gas and minerals earn export income. Challenge: the desert is remote and inaccessible, so roads, pipelines and workers all cost extra. (3) Point 3: farming. Opportunity: desert agriculture (sorghum) and agroforestry. Challenge: thin, infertile soils, extreme heat and unreliable rain limit yields. (4) Finish with a judgement: the opportunities are real but each is limited by cost and inaccessibility, so development is possible only to a moderate extent. Answer: Three developed points, each pairing an opportunity with its barrier, ending with a judgement on the extent..
 Tip: Discuss and to what extent both need a judgement at the end. Decide how far, then say why.</a:t>
@@ -2639,7 +2639,7 @@
               <a:rPr lang="en-US" dirty="0"/>
               <a:t>Teach — Challenges: physical and human. Say it in your own words, then check understanding with a quick question: ask a pupil from the pre-teach group first, since they met these words and ideas before the lesson. Pupils try to recall before you re-explain.
 The challenges of developing hot deserts can be physical or human. Your recall list of physical challenges ran: an arid climate, extreme heat, floods (sudden downpours on hard, bare ground), a hostile ecosystem, salty soils, thin soils, shifting sands, wind erosion and dust storms, and thin vegetation. These are problems the desert itself sets.
-The human challenges were the cards in your diamond nine: the high cost of providing water, salinisation, population growth, lack of roads, pollution threats, existing nomadic populations, the need for conservation, remoteness and desertification. The desert is inaccessible, so infrastructure (roads, pipes, power lines) must be built from scratch at great cost. Supplying water means pumping it from deep aquifers or piping it long distances, and irrigating with it brings its own problem: in the heat the water evaporates and leaves its salts behind, so the soil becomes saline and infertile. People already live there: nomadic herders move their camels and goats to find grazing in a land where plants are sparse, and development can take away their land and water.
+The human challenges were the cards in your diamond nine: remoteness and a lack of roads, the high cost of providing water, salinisation, desertification, population growth, pollution threats, the existing nomadic populations and the need for conservation. The desert is inaccessible, so infrastructure (roads, pipes, power lines) must be built from scratch at great cost. Supplying water means pumping it from deep aquifers or piping it long distances, and irrigating with it brings its own problem: in the heat the water evaporates and leaves its salts behind, so the soil becomes saline and infertile. People already live there: nomadic herders move their camels and goats to find grazing in a land where plants are sparse, and development can take away their land and water.
 Your six-mark model on how the desert climate affects people made three developed points: heat and dryness mean sparse vegetation, so herders must keep moving; long summer droughts mean people must store food and water for months; and sandy, infertile soil plus dust storms that flatten fields make crop farming hard and keep farmers poor. Each point goes from climate to plants or soil to people, which is what the examiner means by developed.
 Worked example — model it step by step, thinking aloud: Plan a six-mark answer to the question: Discuss the extent of the opportunities available to develop the Sahara Desert. (1) Point 1: water. Opportunity: vast aquifers under the desert could irrigate farmland. Challenge: pumping and piping it is expensive, and irrigation causes salinisation. (2) Point 2: minerals and fossil fuels. Opportunity: oil, gas and minerals earn export income. Challenge: the desert is remote and inaccessible, so roads, pipelines and workers all cost extra. (3) Point 3: farming. Opportunity: desert agriculture (sorghum) and agroforestry. Challenge: thin, infertile soils, extreme heat and unreliable rain limit yields. (4) Finish with a judgement: the opportunities are real but each is limited by cost and inaccessibility, so development is possible only to a moderate extent. Answer: Three developed points, each pairing an opportunity with its barrier, ending with a judgement on the extent..
 Tip: Discuss and to what extent both need a judgement at the end. Decide how far, then say why.</a:t>
@@ -19386,11 +19386,11 @@
         <p:spPr>
           <a:xfrm>
             <a:off x="548640" y="1389888"/>
-            <a:ext cx="11094415" cy="608415"/>
+            <a:ext cx="11094415" cy="794343"/>
           </a:xfrm>
           <a:prstGeom prst="roundRect">
             <a:avLst>
-              <a:gd name="adj" fmla="val 12023"/>
+              <a:gd name="adj" fmla="val 9209"/>
             </a:avLst>
           </a:prstGeom>
           <a:solidFill>
@@ -19407,7 +19407,7 @@
         </p:nvSpPr>
         <p:spPr>
           <a:xfrm>
-            <a:off x="676656" y="1527803"/>
+            <a:off x="676656" y="1620767"/>
             <a:ext cx="384048" cy="332586"/>
           </a:xfrm>
           <a:prstGeom prst="hexagon">
@@ -19428,7 +19428,7 @@
         <p:spPr>
           <a:xfrm>
             <a:off x="1143000" y="1389888"/>
-            <a:ext cx="10408615" cy="608415"/>
+            <a:ext cx="10408615" cy="794343"/>
           </a:xfrm>
           <a:prstGeom prst="rect">
             <a:avLst/>
@@ -19444,7 +19444,7 @@
               <a:buNone/>
             </a:pPr>
             <a:r>
-              <a:rPr lang="en-US" sz="2200" dirty="0">
+              <a:rPr lang="en-US" sz="2000" dirty="0">
                 <a:solidFill>
                   <a:srgbClr val="1E2229"/>
                 </a:solidFill>
@@ -19454,7 +19454,7 @@
               </a:rPr>
               <a:t>The challenges of developing hot deserts can be physical or human.</a:t>
             </a:r>
-            <a:endParaRPr lang="en-US" sz="2200" dirty="0"/>
+            <a:endParaRPr lang="en-US" sz="2000" dirty="0"/>
           </a:p>
         </p:txBody>
       </p:sp>
@@ -19466,12 +19466,12 @@
         </p:nvSpPr>
         <p:spPr>
           <a:xfrm>
-            <a:off x="548640" y="2144607"/>
-            <a:ext cx="11094415" cy="1191091"/>
+            <a:off x="548640" y="2330535"/>
+            <a:ext cx="11094415" cy="1284055"/>
           </a:xfrm>
           <a:prstGeom prst="roundRect">
             <a:avLst>
-              <a:gd name="adj" fmla="val 6142"/>
+              <a:gd name="adj" fmla="val 5697"/>
             </a:avLst>
           </a:prstGeom>
           <a:solidFill>
@@ -19488,7 +19488,7 @@
         </p:nvSpPr>
         <p:spPr>
           <a:xfrm>
-            <a:off x="676656" y="2573859"/>
+            <a:off x="676656" y="2806269"/>
             <a:ext cx="384048" cy="332586"/>
           </a:xfrm>
           <a:prstGeom prst="hexagon">
@@ -19508,8 +19508,8 @@
         </p:nvSpPr>
         <p:spPr>
           <a:xfrm>
-            <a:off x="1143000" y="2144607"/>
-            <a:ext cx="10408615" cy="1191091"/>
+            <a:off x="1143000" y="2330535"/>
+            <a:ext cx="10408615" cy="1284055"/>
           </a:xfrm>
           <a:prstGeom prst="rect">
             <a:avLst/>
@@ -19525,7 +19525,7 @@
               <a:buNone/>
             </a:pPr>
             <a:r>
-              <a:rPr lang="en-US" sz="2200" dirty="0">
+              <a:rPr lang="en-US" sz="2000" dirty="0">
                 <a:solidFill>
                   <a:srgbClr val="1E2229"/>
                 </a:solidFill>
@@ -19533,9 +19533,9 @@
                 <a:ea typeface="Calibri" pitchFamily="34" charset="-122"/>
                 <a:cs typeface="Calibri" pitchFamily="34" charset="-120"/>
               </a:rPr>
-              <a:t>The human challenges were the cards in your diamond nine: the high cost of providing water, salinisation, population growth, lack of roads, pollution threats, existing nomadic populations, the need for conservation, remoteness and desertification.</a:t>
-            </a:r>
-            <a:endParaRPr lang="en-US" sz="2200" dirty="0"/>
+              <a:t>The human challenges were the cards in your diamond nine: remoteness and a lack of roads, the high cost of providing water, salinisation, desertification, population growth, pollution threats, the existing nomadic populations and the need for conservation.</a:t>
+            </a:r>
+            <a:endParaRPr lang="en-US" sz="2000" dirty="0"/>
           </a:p>
         </p:txBody>
       </p:sp>
@@ -19547,12 +19547,12 @@
         </p:nvSpPr>
         <p:spPr>
           <a:xfrm>
-            <a:off x="548640" y="3482001"/>
-            <a:ext cx="11094415" cy="1872827"/>
+            <a:off x="548640" y="3760893"/>
+            <a:ext cx="11094415" cy="1593935"/>
           </a:xfrm>
           <a:prstGeom prst="roundRect">
             <a:avLst>
-              <a:gd name="adj" fmla="val 3906"/>
+              <a:gd name="adj" fmla="val 4589"/>
             </a:avLst>
           </a:prstGeom>
           <a:solidFill>
@@ -19569,7 +19569,7 @@
         </p:nvSpPr>
         <p:spPr>
           <a:xfrm>
-            <a:off x="676656" y="4252122"/>
+            <a:off x="676656" y="4391568"/>
             <a:ext cx="384048" cy="332586"/>
           </a:xfrm>
           <a:prstGeom prst="hexagon">
@@ -19589,8 +19589,8 @@
         </p:nvSpPr>
         <p:spPr>
           <a:xfrm>
-            <a:off x="1143000" y="3482001"/>
-            <a:ext cx="10408615" cy="1872827"/>
+            <a:off x="1143000" y="3760893"/>
+            <a:ext cx="10408615" cy="1593935"/>
           </a:xfrm>
           <a:prstGeom prst="rect">
             <a:avLst/>
@@ -19606,7 +19606,7 @@
               <a:buNone/>
             </a:pPr>
             <a:r>
-              <a:rPr lang="en-US" sz="2200" dirty="0">
+              <a:rPr lang="en-US" sz="2000" dirty="0">
                 <a:solidFill>
                   <a:srgbClr val="1E2229"/>
                 </a:solidFill>
@@ -19616,7 +19616,7 @@
               </a:rPr>
               <a:t>Your six-mark model on how the desert climate affects people made three developed points: heat and dryness mean sparse vegetation, so herders must keep moving; long summer droughts mean people must store food and water for months; and sandy, infertile soil plus dust storms that flatten fields make crop farming hard and keep farmers poor.</a:t>
             </a:r>
-            <a:endParaRPr lang="en-US" sz="2200" dirty="0"/>
+            <a:endParaRPr lang="en-US" sz="2000" dirty="0"/>
           </a:p>
         </p:txBody>
       </p:sp>
